--- a/topic10-declaring-types-and-classes/unit-10a-lectures/talk-2/c-record-syntax.pptx
+++ b/topic10-declaring-types-and-classes/unit-10a-lectures/talk-2/c-record-syntax.pptx
@@ -527,10 +527,10 @@
           </a:ln>
           <a:extLst>
             <a:ext uri="{FAA26D3D-D897-4be2-8F04-BA451C77F1D7}">
-              <ma14:placeholderFlag xmlns="" xmlns:ma14="http://schemas.microsoft.com/office/mac/drawingml/2011/main" val="1"/>
+              <ma14:placeholderFlag xmlns:ma14="http://schemas.microsoft.com/office/mac/drawingml/2011/main" xmlns="" val="1"/>
             </a:ext>
             <a:ext uri="{909E8E84-426E-40dd-AFC4-6F175D3DCCD1}">
-              <a14:hiddenFill xmlns="" xmlns:a14="http://schemas.microsoft.com/office/drawing/2010/main">
+              <a14:hiddenFill xmlns:a14="http://schemas.microsoft.com/office/drawing/2010/main" xmlns="">
                 <a:solidFill>
                   <a:srgbClr val="FFFFFF"/>
                 </a:solidFill>
@@ -1207,7 +1207,7 @@
             <a:fld id="{08B9EBBA-996F-894A-B54A-D6246ED52CEA}" type="datetimeFigureOut">
               <a:rPr lang="en-US" smtClean="0"/>
               <a:pPr/>
-              <a:t>3/30/25</a:t>
+              <a:t>3/10/26</a:t>
             </a:fld>
             <a:endParaRPr lang="en-US" dirty="0"/>
           </a:p>
@@ -1629,7 +1629,7 @@
             <a:fld id="{09B482E8-6E0E-1B4F-B1FD-C69DB9E858D9}" type="datetimeFigureOut">
               <a:rPr lang="en-US" smtClean="0"/>
               <a:pPr/>
-              <a:t>3/30/25</a:t>
+              <a:t>3/10/26</a:t>
             </a:fld>
             <a:endParaRPr lang="en-US" dirty="0"/>
           </a:p>
@@ -1973,7 +1973,7 @@
             <a:fld id="{09B482E8-6E0E-1B4F-B1FD-C69DB9E858D9}" type="datetimeFigureOut">
               <a:rPr lang="en-US" smtClean="0"/>
               <a:pPr/>
-              <a:t>3/30/25</a:t>
+              <a:t>3/10/26</a:t>
             </a:fld>
             <a:endParaRPr lang="en-US" dirty="0"/>
           </a:p>
@@ -2386,7 +2386,7 @@
             <a:fld id="{09B482E8-6E0E-1B4F-B1FD-C69DB9E858D9}" type="datetimeFigureOut">
               <a:rPr lang="en-US" smtClean="0"/>
               <a:pPr/>
-              <a:t>3/30/25</a:t>
+              <a:t>3/10/26</a:t>
             </a:fld>
             <a:endParaRPr lang="en-US" dirty="0"/>
           </a:p>
@@ -2962,7 +2962,7 @@
             <a:fld id="{09B482E8-6E0E-1B4F-B1FD-C69DB9E858D9}" type="datetimeFigureOut">
               <a:rPr lang="en-US" smtClean="0"/>
               <a:pPr/>
-              <a:t>3/30/25</a:t>
+              <a:t>3/10/26</a:t>
             </a:fld>
             <a:endParaRPr lang="en-US" dirty="0"/>
           </a:p>
@@ -3651,7 +3651,7 @@
             <a:fld id="{09B482E8-6E0E-1B4F-B1FD-C69DB9E858D9}" type="datetimeFigureOut">
               <a:rPr lang="en-US" smtClean="0"/>
               <a:pPr/>
-              <a:t>3/30/25</a:t>
+              <a:t>3/10/26</a:t>
             </a:fld>
             <a:endParaRPr lang="en-US" dirty="0"/>
           </a:p>
@@ -4572,7 +4572,7 @@
             <a:fld id="{09B482E8-6E0E-1B4F-B1FD-C69DB9E858D9}" type="datetimeFigureOut">
               <a:rPr lang="en-US" smtClean="0"/>
               <a:pPr/>
-              <a:t>3/30/25</a:t>
+              <a:t>3/10/26</a:t>
             </a:fld>
             <a:endParaRPr lang="en-US" dirty="0"/>
           </a:p>
@@ -4893,7 +4893,7 @@
             <a:fld id="{09B482E8-6E0E-1B4F-B1FD-C69DB9E858D9}" type="datetimeFigureOut">
               <a:rPr lang="en-US" smtClean="0"/>
               <a:pPr/>
-              <a:t>3/30/25</a:t>
+              <a:t>3/10/26</a:t>
             </a:fld>
             <a:endParaRPr lang="en-US" dirty="0"/>
           </a:p>
@@ -5164,7 +5164,7 @@
             <a:fld id="{09B482E8-6E0E-1B4F-B1FD-C69DB9E858D9}" type="datetimeFigureOut">
               <a:rPr lang="en-US" smtClean="0"/>
               <a:pPr/>
-              <a:t>3/30/25</a:t>
+              <a:t>3/10/26</a:t>
             </a:fld>
             <a:endParaRPr lang="en-US" dirty="0"/>
           </a:p>
@@ -5362,6 +5362,13 @@
             <a:schemeClr val="lt1"/>
           </a:fontRef>
         </p:style>
+        <p:txBody>
+          <a:bodyPr/>
+          <a:lstStyle/>
+          <a:p>
+            <a:endParaRPr lang="en-US"/>
+          </a:p>
+        </p:txBody>
       </p:sp>
       <p:sp>
         <p:nvSpPr>
@@ -5400,6 +5407,13 @@
             <a:schemeClr val="lt1"/>
           </a:fontRef>
         </p:style>
+        <p:txBody>
+          <a:bodyPr/>
+          <a:lstStyle/>
+          <a:p>
+            <a:endParaRPr lang="en-US"/>
+          </a:p>
+        </p:txBody>
       </p:sp>
       <p:sp>
         <p:nvSpPr>
@@ -5494,7 +5508,7 @@
             <a:fld id="{09B482E8-6E0E-1B4F-B1FD-C69DB9E858D9}" type="datetimeFigureOut">
               <a:rPr lang="en-US" smtClean="0"/>
               <a:pPr/>
-              <a:t>3/30/25</a:t>
+              <a:t>3/10/26</a:t>
             </a:fld>
             <a:endParaRPr lang="en-US" dirty="0"/>
           </a:p>
@@ -5890,7 +5904,7 @@
             <a:fld id="{8DFA1846-DA80-1C48-A609-854EA85C59AD}" type="datetimeFigureOut">
               <a:rPr lang="en-US" smtClean="0"/>
               <a:pPr/>
-              <a:t>3/30/25</a:t>
+              <a:t>3/10/26</a:t>
             </a:fld>
             <a:endParaRPr lang="en-US" dirty="0"/>
           </a:p>
@@ -6273,7 +6287,7 @@
             <a:fld id="{09B482E8-6E0E-1B4F-B1FD-C69DB9E858D9}" type="datetimeFigureOut">
               <a:rPr lang="en-US" smtClean="0"/>
               <a:pPr/>
-              <a:t>3/30/25</a:t>
+              <a:t>3/10/26</a:t>
             </a:fld>
             <a:endParaRPr lang="en-US" dirty="0"/>
           </a:p>
@@ -6786,7 +6800,7 @@
             <a:fld id="{09B482E8-6E0E-1B4F-B1FD-C69DB9E858D9}" type="datetimeFigureOut">
               <a:rPr lang="en-US" smtClean="0"/>
               <a:pPr/>
-              <a:t>3/30/25</a:t>
+              <a:t>3/10/26</a:t>
             </a:fld>
             <a:endParaRPr lang="en-US" dirty="0"/>
           </a:p>
@@ -6970,6 +6984,13 @@
             <a:schemeClr val="lt1"/>
           </a:fontRef>
         </p:style>
+        <p:txBody>
+          <a:bodyPr/>
+          <a:lstStyle/>
+          <a:p>
+            <a:endParaRPr lang="en-US"/>
+          </a:p>
+        </p:txBody>
       </p:sp>
       <p:sp>
         <p:nvSpPr>
@@ -7008,6 +7029,13 @@
             <a:schemeClr val="lt1"/>
           </a:fontRef>
         </p:style>
+        <p:txBody>
+          <a:bodyPr/>
+          <a:lstStyle/>
+          <a:p>
+            <a:endParaRPr lang="en-US"/>
+          </a:p>
+        </p:txBody>
       </p:sp>
       <p:sp>
         <p:nvSpPr>
@@ -7050,7 +7078,7 @@
             <a:fld id="{F13A34C8-038E-2045-AF43-DF7DBB8E0E9E}" type="datetimeFigureOut">
               <a:rPr lang="en-US" smtClean="0"/>
               <a:pPr/>
-              <a:t>3/30/25</a:t>
+              <a:t>3/10/26</a:t>
             </a:fld>
             <a:endParaRPr lang="en-US" dirty="0"/>
           </a:p>
@@ -7201,6 +7229,13 @@
             <a:schemeClr val="lt1"/>
           </a:fontRef>
         </p:style>
+        <p:txBody>
+          <a:bodyPr/>
+          <a:lstStyle/>
+          <a:p>
+            <a:endParaRPr lang="en-US"/>
+          </a:p>
+        </p:txBody>
       </p:sp>
       <p:sp>
         <p:nvSpPr>
@@ -7220,7 +7255,7 @@
             <a:fld id="{8818C68F-D26B-8F47-958C-23B49CF8A634}" type="datetimeFigureOut">
               <a:rPr lang="en-US" smtClean="0"/>
               <a:pPr/>
-              <a:t>3/30/25</a:t>
+              <a:t>3/10/26</a:t>
             </a:fld>
             <a:endParaRPr lang="en-US" dirty="0"/>
           </a:p>
@@ -7617,7 +7652,7 @@
             <a:fld id="{09B482E8-6E0E-1B4F-B1FD-C69DB9E858D9}" type="datetimeFigureOut">
               <a:rPr lang="en-US" smtClean="0"/>
               <a:pPr/>
-              <a:t>3/30/25</a:t>
+              <a:t>3/10/26</a:t>
             </a:fld>
             <a:endParaRPr lang="en-US" dirty="0"/>
           </a:p>
@@ -7801,6 +7836,13 @@
             <a:schemeClr val="lt1"/>
           </a:fontRef>
         </p:style>
+        <p:txBody>
+          <a:bodyPr/>
+          <a:lstStyle/>
+          <a:p>
+            <a:endParaRPr lang="en-US"/>
+          </a:p>
+        </p:txBody>
       </p:sp>
       <p:sp>
         <p:nvSpPr>
@@ -7839,6 +7881,13 @@
             <a:schemeClr val="lt1"/>
           </a:fontRef>
         </p:style>
+        <p:txBody>
+          <a:bodyPr/>
+          <a:lstStyle/>
+          <a:p>
+            <a:endParaRPr lang="en-US"/>
+          </a:p>
+        </p:txBody>
       </p:sp>
       <p:sp>
         <p:nvSpPr>
@@ -8033,7 +8082,7 @@
             <a:fld id="{09B482E8-6E0E-1B4F-B1FD-C69DB9E858D9}" type="datetimeFigureOut">
               <a:rPr lang="en-US" smtClean="0"/>
               <a:pPr/>
-              <a:t>3/30/25</a:t>
+              <a:t>3/10/26</a:t>
             </a:fld>
             <a:endParaRPr lang="en-US" dirty="0"/>
           </a:p>
@@ -8284,7 +8333,7 @@
             <a:fld id="{09B482E8-6E0E-1B4F-B1FD-C69DB9E858D9}" type="datetimeFigureOut">
               <a:rPr lang="en-US" smtClean="0"/>
               <a:pPr/>
-              <a:t>3/30/25</a:t>
+              <a:t>3/10/26</a:t>
             </a:fld>
             <a:endParaRPr lang="en-US" dirty="0"/>
           </a:p>
@@ -8721,14 +8770,14 @@
           <a:noFill/>
           <a:extLst>
             <a:ext uri="{909E8E84-426E-40dd-AFC4-6F175D3DCCD1}">
-              <a14:hiddenFill xmlns="" xmlns:a14="http://schemas.microsoft.com/office/drawing/2010/main">
+              <a14:hiddenFill xmlns:a14="http://schemas.microsoft.com/office/drawing/2010/main" xmlns="">
                 <a:solidFill>
                   <a:srgbClr val="FFFFFF"/>
                 </a:solidFill>
               </a14:hiddenFill>
             </a:ext>
             <a:ext uri="{91240B29-F687-4f45-9708-019B960494DF}">
-              <a14:hiddenLine xmlns="" xmlns:a14="http://schemas.microsoft.com/office/drawing/2010/main" w="9525">
+              <a14:hiddenLine xmlns:a14="http://schemas.microsoft.com/office/drawing/2010/main" xmlns="" w="9525">
                 <a:solidFill>
                   <a:srgbClr val="000000"/>
                 </a:solidFill>
@@ -8936,7 +8985,7 @@
               <a:rPr kumimoji="1" lang="en-US" sz="2800" dirty="0">
                 <a:cs typeface="+mn-cs"/>
               </a:rPr>
-              <a:t>Chapter 10.2 - Syntax and Use of Records</a:t>
+              <a:t>Topic 10.2 - Syntax and Use of Records</a:t>
             </a:r>
           </a:p>
         </p:txBody>
@@ -8976,14 +9025,14 @@
           </a:ln>
           <a:extLst>
             <a:ext uri="{909E8E84-426E-40dd-AFC4-6F175D3DCCD1}">
-              <a14:hiddenFill xmlns="" xmlns:a14="http://schemas.microsoft.com/office/drawing/2010/main">
+              <a14:hiddenFill xmlns:a14="http://schemas.microsoft.com/office/drawing/2010/main" xmlns="">
                 <a:solidFill>
                   <a:srgbClr val="FFFFFF"/>
                 </a:solidFill>
               </a14:hiddenFill>
             </a:ext>
             <a:ext uri="{91240B29-F687-4f45-9708-019B960494DF}">
-              <a14:hiddenLine xmlns="" xmlns:a14="http://schemas.microsoft.com/office/drawing/2010/main" w="9525">
+              <a14:hiddenLine xmlns:a14="http://schemas.microsoft.com/office/drawing/2010/main" xmlns="" w="9525">
                 <a:solidFill>
                   <a:srgbClr val="000000"/>
                 </a:solidFill>
@@ -9068,14 +9117,14 @@
           </a:xfrm>
           <a:extLst>
             <a:ext uri="{909E8E84-426E-40dd-AFC4-6F175D3DCCD1}">
-              <a14:hiddenFill xmlns:a14="http://schemas.microsoft.com/office/drawing/2010/main" xmlns="">
+              <a14:hiddenFill xmlns="" xmlns:a14="http://schemas.microsoft.com/office/drawing/2010/main">
                 <a:solidFill>
                   <a:srgbClr val="FFFFFF"/>
                 </a:solidFill>
               </a14:hiddenFill>
             </a:ext>
             <a:ext uri="{91240B29-F687-4f45-9708-019B960494DF}">
-              <a14:hiddenLine xmlns:a14="http://schemas.microsoft.com/office/drawing/2010/main" xmlns="" w="9525">
+              <a14:hiddenLine xmlns="" xmlns:a14="http://schemas.microsoft.com/office/drawing/2010/main" w="9525">
                 <a:solidFill>
                   <a:srgbClr val="000000"/>
                 </a:solidFill>
@@ -9287,14 +9336,14 @@
           <a:noFill/>
           <a:extLst>
             <a:ext uri="{909E8E84-426E-40dd-AFC4-6F175D3DCCD1}">
-              <a14:hiddenFill xmlns="" xmlns:a14="http://schemas.microsoft.com/office/drawing/2010/main">
+              <a14:hiddenFill xmlns:a14="http://schemas.microsoft.com/office/drawing/2010/main" xmlns="">
                 <a:solidFill>
                   <a:srgbClr val="FFFFFF"/>
                 </a:solidFill>
               </a14:hiddenFill>
             </a:ext>
             <a:ext uri="{91240B29-F687-4f45-9708-019B960494DF}">
-              <a14:hiddenLine xmlns="" xmlns:a14="http://schemas.microsoft.com/office/drawing/2010/main" w="9525">
+              <a14:hiddenLine xmlns:a14="http://schemas.microsoft.com/office/drawing/2010/main" xmlns="" w="9525">
                 <a:solidFill>
                   <a:srgbClr val="000000"/>
                 </a:solidFill>
@@ -9897,14 +9946,14 @@
           <a:noFill/>
           <a:extLst>
             <a:ext uri="{909E8E84-426E-40dd-AFC4-6F175D3DCCD1}">
-              <a14:hiddenFill xmlns="" xmlns:a14="http://schemas.microsoft.com/office/drawing/2010/main">
+              <a14:hiddenFill xmlns:a14="http://schemas.microsoft.com/office/drawing/2010/main" xmlns="">
                 <a:solidFill>
                   <a:srgbClr val="FFFFFF"/>
                 </a:solidFill>
               </a14:hiddenFill>
             </a:ext>
             <a:ext uri="{91240B29-F687-4f45-9708-019B960494DF}">
-              <a14:hiddenLine xmlns="" xmlns:a14="http://schemas.microsoft.com/office/drawing/2010/main" w="9525">
+              <a14:hiddenLine xmlns:a14="http://schemas.microsoft.com/office/drawing/2010/main" xmlns="" w="9525">
                 <a:solidFill>
                   <a:srgbClr val="000000"/>
                 </a:solidFill>
@@ -10613,14 +10662,14 @@
           <a:noFill/>
           <a:extLst>
             <a:ext uri="{909E8E84-426E-40dd-AFC4-6F175D3DCCD1}">
-              <a14:hiddenFill xmlns="" xmlns:a14="http://schemas.microsoft.com/office/drawing/2010/main">
+              <a14:hiddenFill xmlns:a14="http://schemas.microsoft.com/office/drawing/2010/main" xmlns="">
                 <a:solidFill>
                   <a:srgbClr val="FFFFFF"/>
                 </a:solidFill>
               </a14:hiddenFill>
             </a:ext>
             <a:ext uri="{91240B29-F687-4f45-9708-019B960494DF}">
-              <a14:hiddenLine xmlns="" xmlns:a14="http://schemas.microsoft.com/office/drawing/2010/main" w="9525">
+              <a14:hiddenLine xmlns:a14="http://schemas.microsoft.com/office/drawing/2010/main" xmlns="" w="9525">
                 <a:solidFill>
                   <a:srgbClr val="000000"/>
                 </a:solidFill>
@@ -11211,15 +11260,33 @@
                                   </p:childTnLst>
                                 </p:cTn>
                               </p:par>
+                            </p:childTnLst>
+                          </p:cTn>
+                        </p:par>
+                      </p:childTnLst>
+                    </p:cTn>
+                  </p:par>
+                  <p:par>
+                    <p:cTn id="21" fill="hold">
+                      <p:stCondLst>
+                        <p:cond delay="indefinite"/>
+                      </p:stCondLst>
+                      <p:childTnLst>
+                        <p:par>
+                          <p:cTn id="22" fill="hold">
+                            <p:stCondLst>
+                              <p:cond delay="0"/>
+                            </p:stCondLst>
+                            <p:childTnLst>
                               <p:par>
-                                <p:cTn id="21" presetID="2" presetClass="entr" presetSubtype="4" fill="hold" grpId="0" nodeType="withEffect">
+                                <p:cTn id="23" presetID="2" presetClass="entr" presetSubtype="4" fill="hold" nodeType="clickEffect">
                                   <p:stCondLst>
                                     <p:cond delay="0"/>
                                   </p:stCondLst>
                                   <p:childTnLst>
                                     <p:set>
                                       <p:cBhvr>
-                                        <p:cTn id="22" dur="1" fill="hold">
+                                        <p:cTn id="24" dur="1" fill="hold">
                                           <p:stCondLst>
                                             <p:cond delay="0"/>
                                           </p:stCondLst>
@@ -11241,7 +11308,7 @@
                                     </p:set>
                                     <p:anim calcmode="lin" valueType="num">
                                       <p:cBhvr additive="base">
-                                        <p:cTn id="23" dur="500" fill="hold"/>
+                                        <p:cTn id="25" dur="500" fill="hold"/>
                                         <p:tgtEl>
                                           <p:spTgt spid="654340">
                                             <p:txEl>
@@ -11268,553 +11335,7 @@
                                     </p:anim>
                                     <p:anim calcmode="lin" valueType="num">
                                       <p:cBhvr additive="base">
-                                        <p:cTn id="24" dur="500" fill="hold"/>
-                                        <p:tgtEl>
-                                          <p:spTgt spid="654340">
-                                            <p:txEl>
-                                              <p:pRg st="3" end="3"/>
-                                            </p:txEl>
-                                          </p:spTgt>
-                                        </p:tgtEl>
-                                        <p:attrNameLst>
-                                          <p:attrName>ppt_y</p:attrName>
-                                        </p:attrNameLst>
-                                      </p:cBhvr>
-                                      <p:tavLst>
-                                        <p:tav tm="0">
-                                          <p:val>
-                                            <p:strVal val="1+#ppt_h/2"/>
-                                          </p:val>
-                                        </p:tav>
-                                        <p:tav tm="100000">
-                                          <p:val>
-                                            <p:strVal val="#ppt_y"/>
-                                          </p:val>
-                                        </p:tav>
-                                      </p:tavLst>
-                                    </p:anim>
-                                  </p:childTnLst>
-                                </p:cTn>
-                              </p:par>
-                              <p:par>
-                                <p:cTn id="25" presetID="2" presetClass="entr" presetSubtype="4" fill="hold" grpId="0" nodeType="withEffect">
-                                  <p:stCondLst>
-                                    <p:cond delay="0"/>
-                                  </p:stCondLst>
-                                  <p:childTnLst>
-                                    <p:set>
-                                      <p:cBhvr>
-                                        <p:cTn id="26" dur="1" fill="hold">
-                                          <p:stCondLst>
-                                            <p:cond delay="0"/>
-                                          </p:stCondLst>
-                                        </p:cTn>
-                                        <p:tgtEl>
-                                          <p:spTgt spid="654340">
-                                            <p:txEl>
-                                              <p:pRg st="4" end="4"/>
-                                            </p:txEl>
-                                          </p:spTgt>
-                                        </p:tgtEl>
-                                        <p:attrNameLst>
-                                          <p:attrName>style.visibility</p:attrName>
-                                        </p:attrNameLst>
-                                      </p:cBhvr>
-                                      <p:to>
-                                        <p:strVal val="visible"/>
-                                      </p:to>
-                                    </p:set>
-                                    <p:anim calcmode="lin" valueType="num">
-                                      <p:cBhvr additive="base">
-                                        <p:cTn id="27" dur="500" fill="hold"/>
-                                        <p:tgtEl>
-                                          <p:spTgt spid="654340">
-                                            <p:txEl>
-                                              <p:pRg st="4" end="4"/>
-                                            </p:txEl>
-                                          </p:spTgt>
-                                        </p:tgtEl>
-                                        <p:attrNameLst>
-                                          <p:attrName>ppt_x</p:attrName>
-                                        </p:attrNameLst>
-                                      </p:cBhvr>
-                                      <p:tavLst>
-                                        <p:tav tm="0">
-                                          <p:val>
-                                            <p:strVal val="#ppt_x"/>
-                                          </p:val>
-                                        </p:tav>
-                                        <p:tav tm="100000">
-                                          <p:val>
-                                            <p:strVal val="#ppt_x"/>
-                                          </p:val>
-                                        </p:tav>
-                                      </p:tavLst>
-                                    </p:anim>
-                                    <p:anim calcmode="lin" valueType="num">
-                                      <p:cBhvr additive="base">
-                                        <p:cTn id="28" dur="500" fill="hold"/>
-                                        <p:tgtEl>
-                                          <p:spTgt spid="654340">
-                                            <p:txEl>
-                                              <p:pRg st="4" end="4"/>
-                                            </p:txEl>
-                                          </p:spTgt>
-                                        </p:tgtEl>
-                                        <p:attrNameLst>
-                                          <p:attrName>ppt_y</p:attrName>
-                                        </p:attrNameLst>
-                                      </p:cBhvr>
-                                      <p:tavLst>
-                                        <p:tav tm="0">
-                                          <p:val>
-                                            <p:strVal val="1+#ppt_h/2"/>
-                                          </p:val>
-                                        </p:tav>
-                                        <p:tav tm="100000">
-                                          <p:val>
-                                            <p:strVal val="#ppt_y"/>
-                                          </p:val>
-                                        </p:tav>
-                                      </p:tavLst>
-                                    </p:anim>
-                                  </p:childTnLst>
-                                </p:cTn>
-                              </p:par>
-                              <p:par>
-                                <p:cTn id="29" presetID="2" presetClass="entr" presetSubtype="4" fill="hold" grpId="0" nodeType="withEffect">
-                                  <p:stCondLst>
-                                    <p:cond delay="0"/>
-                                  </p:stCondLst>
-                                  <p:childTnLst>
-                                    <p:set>
-                                      <p:cBhvr>
-                                        <p:cTn id="30" dur="1" fill="hold">
-                                          <p:stCondLst>
-                                            <p:cond delay="0"/>
-                                          </p:stCondLst>
-                                        </p:cTn>
-                                        <p:tgtEl>
-                                          <p:spTgt spid="654340">
-                                            <p:txEl>
-                                              <p:pRg st="6" end="6"/>
-                                            </p:txEl>
-                                          </p:spTgt>
-                                        </p:tgtEl>
-                                        <p:attrNameLst>
-                                          <p:attrName>style.visibility</p:attrName>
-                                        </p:attrNameLst>
-                                      </p:cBhvr>
-                                      <p:to>
-                                        <p:strVal val="visible"/>
-                                      </p:to>
-                                    </p:set>
-                                    <p:anim calcmode="lin" valueType="num">
-                                      <p:cBhvr additive="base">
-                                        <p:cTn id="31" dur="500" fill="hold"/>
-                                        <p:tgtEl>
-                                          <p:spTgt spid="654340">
-                                            <p:txEl>
-                                              <p:pRg st="6" end="6"/>
-                                            </p:txEl>
-                                          </p:spTgt>
-                                        </p:tgtEl>
-                                        <p:attrNameLst>
-                                          <p:attrName>ppt_x</p:attrName>
-                                        </p:attrNameLst>
-                                      </p:cBhvr>
-                                      <p:tavLst>
-                                        <p:tav tm="0">
-                                          <p:val>
-                                            <p:strVal val="#ppt_x"/>
-                                          </p:val>
-                                        </p:tav>
-                                        <p:tav tm="100000">
-                                          <p:val>
-                                            <p:strVal val="#ppt_x"/>
-                                          </p:val>
-                                        </p:tav>
-                                      </p:tavLst>
-                                    </p:anim>
-                                    <p:anim calcmode="lin" valueType="num">
-                                      <p:cBhvr additive="base">
-                                        <p:cTn id="32" dur="500" fill="hold"/>
-                                        <p:tgtEl>
-                                          <p:spTgt spid="654340">
-                                            <p:txEl>
-                                              <p:pRg st="6" end="6"/>
-                                            </p:txEl>
-                                          </p:spTgt>
-                                        </p:tgtEl>
-                                        <p:attrNameLst>
-                                          <p:attrName>ppt_y</p:attrName>
-                                        </p:attrNameLst>
-                                      </p:cBhvr>
-                                      <p:tavLst>
-                                        <p:tav tm="0">
-                                          <p:val>
-                                            <p:strVal val="1+#ppt_h/2"/>
-                                          </p:val>
-                                        </p:tav>
-                                        <p:tav tm="100000">
-                                          <p:val>
-                                            <p:strVal val="#ppt_y"/>
-                                          </p:val>
-                                        </p:tav>
-                                      </p:tavLst>
-                                    </p:anim>
-                                  </p:childTnLst>
-                                </p:cTn>
-                              </p:par>
-                            </p:childTnLst>
-                          </p:cTn>
-                        </p:par>
-                      </p:childTnLst>
-                    </p:cTn>
-                  </p:par>
-                  <p:par>
-                    <p:cTn id="33" fill="hold">
-                      <p:stCondLst>
-                        <p:cond delay="indefinite"/>
-                      </p:stCondLst>
-                      <p:childTnLst>
-                        <p:par>
-                          <p:cTn id="34" fill="hold">
-                            <p:stCondLst>
-                              <p:cond delay="0"/>
-                            </p:stCondLst>
-                            <p:childTnLst>
-                              <p:par>
-                                <p:cTn id="35" presetID="2" presetClass="entr" presetSubtype="4" fill="hold" nodeType="clickEffect">
-                                  <p:stCondLst>
-                                    <p:cond delay="0"/>
-                                  </p:stCondLst>
-                                  <p:childTnLst>
-                                    <p:set>
-                                      <p:cBhvr>
-                                        <p:cTn id="36" dur="1" fill="hold">
-                                          <p:stCondLst>
-                                            <p:cond delay="0"/>
-                                          </p:stCondLst>
-                                        </p:cTn>
-                                        <p:tgtEl>
-                                          <p:spTgt spid="654340">
-                                            <p:txEl>
-                                              <p:pRg st="0" end="0"/>
-                                            </p:txEl>
-                                          </p:spTgt>
-                                        </p:tgtEl>
-                                        <p:attrNameLst>
-                                          <p:attrName>style.visibility</p:attrName>
-                                        </p:attrNameLst>
-                                      </p:cBhvr>
-                                      <p:to>
-                                        <p:strVal val="visible"/>
-                                      </p:to>
-                                    </p:set>
-                                    <p:anim calcmode="lin" valueType="num">
-                                      <p:cBhvr additive="base">
-                                        <p:cTn id="37" dur="500" fill="hold"/>
-                                        <p:tgtEl>
-                                          <p:spTgt spid="654340">
-                                            <p:txEl>
-                                              <p:pRg st="0" end="0"/>
-                                            </p:txEl>
-                                          </p:spTgt>
-                                        </p:tgtEl>
-                                        <p:attrNameLst>
-                                          <p:attrName>ppt_x</p:attrName>
-                                        </p:attrNameLst>
-                                      </p:cBhvr>
-                                      <p:tavLst>
-                                        <p:tav tm="0">
-                                          <p:val>
-                                            <p:strVal val="#ppt_x"/>
-                                          </p:val>
-                                        </p:tav>
-                                        <p:tav tm="100000">
-                                          <p:val>
-                                            <p:strVal val="#ppt_x"/>
-                                          </p:val>
-                                        </p:tav>
-                                      </p:tavLst>
-                                    </p:anim>
-                                    <p:anim calcmode="lin" valueType="num">
-                                      <p:cBhvr additive="base">
-                                        <p:cTn id="38" dur="500" fill="hold"/>
-                                        <p:tgtEl>
-                                          <p:spTgt spid="654340">
-                                            <p:txEl>
-                                              <p:pRg st="0" end="0"/>
-                                            </p:txEl>
-                                          </p:spTgt>
-                                        </p:tgtEl>
-                                        <p:attrNameLst>
-                                          <p:attrName>ppt_y</p:attrName>
-                                        </p:attrNameLst>
-                                      </p:cBhvr>
-                                      <p:tavLst>
-                                        <p:tav tm="0">
-                                          <p:val>
-                                            <p:strVal val="1+#ppt_h/2"/>
-                                          </p:val>
-                                        </p:tav>
-                                        <p:tav tm="100000">
-                                          <p:val>
-                                            <p:strVal val="#ppt_y"/>
-                                          </p:val>
-                                        </p:tav>
-                                      </p:tavLst>
-                                    </p:anim>
-                                  </p:childTnLst>
-                                </p:cTn>
-                              </p:par>
-                              <p:par>
-                                <p:cTn id="39" presetID="2" presetClass="entr" presetSubtype="4" fill="hold" nodeType="withEffect">
-                                  <p:stCondLst>
-                                    <p:cond delay="0"/>
-                                  </p:stCondLst>
-                                  <p:childTnLst>
-                                    <p:set>
-                                      <p:cBhvr>
-                                        <p:cTn id="40" dur="1" fill="hold">
-                                          <p:stCondLst>
-                                            <p:cond delay="0"/>
-                                          </p:stCondLst>
-                                        </p:cTn>
-                                        <p:tgtEl>
-                                          <p:spTgt spid="654340">
-                                            <p:txEl>
-                                              <p:pRg st="1" end="1"/>
-                                            </p:txEl>
-                                          </p:spTgt>
-                                        </p:tgtEl>
-                                        <p:attrNameLst>
-                                          <p:attrName>style.visibility</p:attrName>
-                                        </p:attrNameLst>
-                                      </p:cBhvr>
-                                      <p:to>
-                                        <p:strVal val="visible"/>
-                                      </p:to>
-                                    </p:set>
-                                    <p:anim calcmode="lin" valueType="num">
-                                      <p:cBhvr additive="base">
-                                        <p:cTn id="41" dur="500" fill="hold"/>
-                                        <p:tgtEl>
-                                          <p:spTgt spid="654340">
-                                            <p:txEl>
-                                              <p:pRg st="1" end="1"/>
-                                            </p:txEl>
-                                          </p:spTgt>
-                                        </p:tgtEl>
-                                        <p:attrNameLst>
-                                          <p:attrName>ppt_x</p:attrName>
-                                        </p:attrNameLst>
-                                      </p:cBhvr>
-                                      <p:tavLst>
-                                        <p:tav tm="0">
-                                          <p:val>
-                                            <p:strVal val="#ppt_x"/>
-                                          </p:val>
-                                        </p:tav>
-                                        <p:tav tm="100000">
-                                          <p:val>
-                                            <p:strVal val="#ppt_x"/>
-                                          </p:val>
-                                        </p:tav>
-                                      </p:tavLst>
-                                    </p:anim>
-                                    <p:anim calcmode="lin" valueType="num">
-                                      <p:cBhvr additive="base">
-                                        <p:cTn id="42" dur="500" fill="hold"/>
-                                        <p:tgtEl>
-                                          <p:spTgt spid="654340">
-                                            <p:txEl>
-                                              <p:pRg st="1" end="1"/>
-                                            </p:txEl>
-                                          </p:spTgt>
-                                        </p:tgtEl>
-                                        <p:attrNameLst>
-                                          <p:attrName>ppt_y</p:attrName>
-                                        </p:attrNameLst>
-                                      </p:cBhvr>
-                                      <p:tavLst>
-                                        <p:tav tm="0">
-                                          <p:val>
-                                            <p:strVal val="1+#ppt_h/2"/>
-                                          </p:val>
-                                        </p:tav>
-                                        <p:tav tm="100000">
-                                          <p:val>
-                                            <p:strVal val="#ppt_y"/>
-                                          </p:val>
-                                        </p:tav>
-                                      </p:tavLst>
-                                    </p:anim>
-                                  </p:childTnLst>
-                                </p:cTn>
-                              </p:par>
-                              <p:par>
-                                <p:cTn id="43" presetID="2" presetClass="entr" presetSubtype="4" fill="hold" nodeType="withEffect">
-                                  <p:stCondLst>
-                                    <p:cond delay="0"/>
-                                  </p:stCondLst>
-                                  <p:childTnLst>
-                                    <p:set>
-                                      <p:cBhvr>
-                                        <p:cTn id="44" dur="1" fill="hold">
-                                          <p:stCondLst>
-                                            <p:cond delay="0"/>
-                                          </p:stCondLst>
-                                        </p:cTn>
-                                        <p:tgtEl>
-                                          <p:spTgt spid="654340">
-                                            <p:txEl>
-                                              <p:pRg st="2" end="2"/>
-                                            </p:txEl>
-                                          </p:spTgt>
-                                        </p:tgtEl>
-                                        <p:attrNameLst>
-                                          <p:attrName>style.visibility</p:attrName>
-                                        </p:attrNameLst>
-                                      </p:cBhvr>
-                                      <p:to>
-                                        <p:strVal val="visible"/>
-                                      </p:to>
-                                    </p:set>
-                                    <p:anim calcmode="lin" valueType="num">
-                                      <p:cBhvr additive="base">
-                                        <p:cTn id="45" dur="500" fill="hold"/>
-                                        <p:tgtEl>
-                                          <p:spTgt spid="654340">
-                                            <p:txEl>
-                                              <p:pRg st="2" end="2"/>
-                                            </p:txEl>
-                                          </p:spTgt>
-                                        </p:tgtEl>
-                                        <p:attrNameLst>
-                                          <p:attrName>ppt_x</p:attrName>
-                                        </p:attrNameLst>
-                                      </p:cBhvr>
-                                      <p:tavLst>
-                                        <p:tav tm="0">
-                                          <p:val>
-                                            <p:strVal val="#ppt_x"/>
-                                          </p:val>
-                                        </p:tav>
-                                        <p:tav tm="100000">
-                                          <p:val>
-                                            <p:strVal val="#ppt_x"/>
-                                          </p:val>
-                                        </p:tav>
-                                      </p:tavLst>
-                                    </p:anim>
-                                    <p:anim calcmode="lin" valueType="num">
-                                      <p:cBhvr additive="base">
-                                        <p:cTn id="46" dur="500" fill="hold"/>
-                                        <p:tgtEl>
-                                          <p:spTgt spid="654340">
-                                            <p:txEl>
-                                              <p:pRg st="2" end="2"/>
-                                            </p:txEl>
-                                          </p:spTgt>
-                                        </p:tgtEl>
-                                        <p:attrNameLst>
-                                          <p:attrName>ppt_y</p:attrName>
-                                        </p:attrNameLst>
-                                      </p:cBhvr>
-                                      <p:tavLst>
-                                        <p:tav tm="0">
-                                          <p:val>
-                                            <p:strVal val="1+#ppt_h/2"/>
-                                          </p:val>
-                                        </p:tav>
-                                        <p:tav tm="100000">
-                                          <p:val>
-                                            <p:strVal val="#ppt_y"/>
-                                          </p:val>
-                                        </p:tav>
-                                      </p:tavLst>
-                                    </p:anim>
-                                  </p:childTnLst>
-                                </p:cTn>
-                              </p:par>
-                            </p:childTnLst>
-                          </p:cTn>
-                        </p:par>
-                      </p:childTnLst>
-                    </p:cTn>
-                  </p:par>
-                  <p:par>
-                    <p:cTn id="47" fill="hold">
-                      <p:stCondLst>
-                        <p:cond delay="indefinite"/>
-                      </p:stCondLst>
-                      <p:childTnLst>
-                        <p:par>
-                          <p:cTn id="48" fill="hold">
-                            <p:stCondLst>
-                              <p:cond delay="0"/>
-                            </p:stCondLst>
-                            <p:childTnLst>
-                              <p:par>
-                                <p:cTn id="49" presetID="2" presetClass="entr" presetSubtype="4" fill="hold" nodeType="clickEffect">
-                                  <p:stCondLst>
-                                    <p:cond delay="0"/>
-                                  </p:stCondLst>
-                                  <p:childTnLst>
-                                    <p:set>
-                                      <p:cBhvr>
-                                        <p:cTn id="50" dur="1" fill="hold">
-                                          <p:stCondLst>
-                                            <p:cond delay="0"/>
-                                          </p:stCondLst>
-                                        </p:cTn>
-                                        <p:tgtEl>
-                                          <p:spTgt spid="654340">
-                                            <p:txEl>
-                                              <p:pRg st="3" end="3"/>
-                                            </p:txEl>
-                                          </p:spTgt>
-                                        </p:tgtEl>
-                                        <p:attrNameLst>
-                                          <p:attrName>style.visibility</p:attrName>
-                                        </p:attrNameLst>
-                                      </p:cBhvr>
-                                      <p:to>
-                                        <p:strVal val="visible"/>
-                                      </p:to>
-                                    </p:set>
-                                    <p:anim calcmode="lin" valueType="num">
-                                      <p:cBhvr additive="base">
-                                        <p:cTn id="51" dur="500" fill="hold"/>
-                                        <p:tgtEl>
-                                          <p:spTgt spid="654340">
-                                            <p:txEl>
-                                              <p:pRg st="3" end="3"/>
-                                            </p:txEl>
-                                          </p:spTgt>
-                                        </p:tgtEl>
-                                        <p:attrNameLst>
-                                          <p:attrName>ppt_x</p:attrName>
-                                        </p:attrNameLst>
-                                      </p:cBhvr>
-                                      <p:tavLst>
-                                        <p:tav tm="0">
-                                          <p:val>
-                                            <p:strVal val="#ppt_x"/>
-                                          </p:val>
-                                        </p:tav>
-                                        <p:tav tm="100000">
-                                          <p:val>
-                                            <p:strVal val="#ppt_x"/>
-                                          </p:val>
-                                        </p:tav>
-                                      </p:tavLst>
-                                    </p:anim>
-                                    <p:anim calcmode="lin" valueType="num">
-                                      <p:cBhvr additive="base">
-                                        <p:cTn id="52" dur="500" fill="hold"/>
+                                        <p:cTn id="26" dur="500" fill="hold"/>
                                         <p:tgtEl>
                                           <p:spTgt spid="654340">
                                             <p:txEl>
@@ -11849,26 +11370,26 @@
                     </p:cTn>
                   </p:par>
                   <p:par>
-                    <p:cTn id="53" fill="hold">
+                    <p:cTn id="27" fill="hold">
                       <p:stCondLst>
                         <p:cond delay="indefinite"/>
                       </p:stCondLst>
                       <p:childTnLst>
                         <p:par>
-                          <p:cTn id="54" fill="hold">
+                          <p:cTn id="28" fill="hold">
                             <p:stCondLst>
                               <p:cond delay="0"/>
                             </p:stCondLst>
                             <p:childTnLst>
                               <p:par>
-                                <p:cTn id="55" presetID="2" presetClass="entr" presetSubtype="4" fill="hold" nodeType="clickEffect">
+                                <p:cTn id="29" presetID="2" presetClass="entr" presetSubtype="4" fill="hold" nodeType="clickEffect">
                                   <p:stCondLst>
                                     <p:cond delay="0"/>
                                   </p:stCondLst>
                                   <p:childTnLst>
                                     <p:set>
                                       <p:cBhvr>
-                                        <p:cTn id="56" dur="1" fill="hold">
+                                        <p:cTn id="30" dur="1" fill="hold">
                                           <p:stCondLst>
                                             <p:cond delay="0"/>
                                           </p:stCondLst>
@@ -11890,7 +11411,7 @@
                                     </p:set>
                                     <p:anim calcmode="lin" valueType="num">
                                       <p:cBhvr additive="base">
-                                        <p:cTn id="57" dur="500" fill="hold"/>
+                                        <p:cTn id="31" dur="500" fill="hold"/>
                                         <p:tgtEl>
                                           <p:spTgt spid="654340">
                                             <p:txEl>
@@ -11917,7 +11438,7 @@
                                     </p:anim>
                                     <p:anim calcmode="lin" valueType="num">
                                       <p:cBhvr additive="base">
-                                        <p:cTn id="58" dur="500" fill="hold"/>
+                                        <p:cTn id="32" dur="500" fill="hold"/>
                                         <p:tgtEl>
                                           <p:spTgt spid="654340">
                                             <p:txEl>
@@ -12036,14 +11557,14 @@
           <a:noFill/>
           <a:extLst>
             <a:ext uri="{909E8E84-426E-40dd-AFC4-6F175D3DCCD1}">
-              <a14:hiddenFill xmlns="" xmlns:a14="http://schemas.microsoft.com/office/drawing/2010/main">
+              <a14:hiddenFill xmlns:a14="http://schemas.microsoft.com/office/drawing/2010/main" xmlns="">
                 <a:solidFill>
                   <a:srgbClr val="FFFFFF"/>
                 </a:solidFill>
               </a14:hiddenFill>
             </a:ext>
             <a:ext uri="{91240B29-F687-4f45-9708-019B960494DF}">
-              <a14:hiddenLine xmlns="" xmlns:a14="http://schemas.microsoft.com/office/drawing/2010/main" w="9525">
+              <a14:hiddenLine xmlns:a14="http://schemas.microsoft.com/office/drawing/2010/main" xmlns="" w="9525">
                 <a:solidFill>
                   <a:srgbClr val="000000"/>
                 </a:solidFill>
@@ -12458,14 +11979,14 @@
           <a:noFill/>
           <a:extLst>
             <a:ext uri="{909E8E84-426E-40dd-AFC4-6F175D3DCCD1}">
-              <a14:hiddenFill xmlns="" xmlns:a14="http://schemas.microsoft.com/office/drawing/2010/main">
+              <a14:hiddenFill xmlns:a14="http://schemas.microsoft.com/office/drawing/2010/main" xmlns="">
                 <a:solidFill>
                   <a:srgbClr val="FFFFFF"/>
                 </a:solidFill>
               </a14:hiddenFill>
             </a:ext>
             <a:ext uri="{91240B29-F687-4f45-9708-019B960494DF}">
-              <a14:hiddenLine xmlns="" xmlns:a14="http://schemas.microsoft.com/office/drawing/2010/main" w="9525">
+              <a14:hiddenLine xmlns:a14="http://schemas.microsoft.com/office/drawing/2010/main" xmlns="" w="9525">
                 <a:solidFill>
                   <a:srgbClr val="000000"/>
                 </a:solidFill>
@@ -12900,7 +12421,7 @@
                             </p:stCondLst>
                             <p:childTnLst>
                               <p:par>
-                                <p:cTn id="11" presetID="2" presetClass="entr" presetSubtype="4" fill="hold" nodeType="clickEffect">
+                                <p:cTn id="11" presetID="2" presetClass="entr" presetSubtype="4" fill="hold" grpId="0" nodeType="clickEffect">
                                   <p:stCondLst>
                                     <p:cond delay="0"/>
                                   </p:stCondLst>
@@ -12908,6 +12429,85 @@
                                     <p:set>
                                       <p:cBhvr>
                                         <p:cTn id="12" dur="1" fill="hold">
+                                          <p:stCondLst>
+                                            <p:cond delay="0"/>
+                                          </p:stCondLst>
+                                        </p:cTn>
+                                        <p:tgtEl>
+                                          <p:spTgt spid="654340">
+                                            <p:bg/>
+                                          </p:spTgt>
+                                        </p:tgtEl>
+                                        <p:attrNameLst>
+                                          <p:attrName>style.visibility</p:attrName>
+                                        </p:attrNameLst>
+                                      </p:cBhvr>
+                                      <p:to>
+                                        <p:strVal val="visible"/>
+                                      </p:to>
+                                    </p:set>
+                                    <p:anim calcmode="lin" valueType="num">
+                                      <p:cBhvr additive="base">
+                                        <p:cTn id="13" dur="500" fill="hold"/>
+                                        <p:tgtEl>
+                                          <p:spTgt spid="654340">
+                                            <p:bg/>
+                                          </p:spTgt>
+                                        </p:tgtEl>
+                                        <p:attrNameLst>
+                                          <p:attrName>ppt_x</p:attrName>
+                                        </p:attrNameLst>
+                                      </p:cBhvr>
+                                      <p:tavLst>
+                                        <p:tav tm="0">
+                                          <p:val>
+                                            <p:strVal val="#ppt_x"/>
+                                          </p:val>
+                                        </p:tav>
+                                        <p:tav tm="100000">
+                                          <p:val>
+                                            <p:strVal val="#ppt_x"/>
+                                          </p:val>
+                                        </p:tav>
+                                      </p:tavLst>
+                                    </p:anim>
+                                    <p:anim calcmode="lin" valueType="num">
+                                      <p:cBhvr additive="base">
+                                        <p:cTn id="14" dur="500" fill="hold"/>
+                                        <p:tgtEl>
+                                          <p:spTgt spid="654340">
+                                            <p:bg/>
+                                          </p:spTgt>
+                                        </p:tgtEl>
+                                        <p:attrNameLst>
+                                          <p:attrName>ppt_y</p:attrName>
+                                        </p:attrNameLst>
+                                      </p:cBhvr>
+                                      <p:tavLst>
+                                        <p:tav tm="0">
+                                          <p:val>
+                                            <p:strVal val="1+#ppt_h/2"/>
+                                          </p:val>
+                                        </p:tav>
+                                        <p:tav tm="100000">
+                                          <p:val>
+                                            <p:strVal val="#ppt_y"/>
+                                          </p:val>
+                                        </p:tav>
+                                      </p:tavLst>
+                                    </p:anim>
+                                  </p:childTnLst>
+                                </p:cTn>
+                              </p:par>
+                              <p:par>
+                                <p:cTn id="15" presetID="2" presetClass="entr" presetSubtype="4" fill="hold" grpId="0" nodeType="withEffect">
+                                  <p:stCondLst>
+                                    <p:cond delay="0"/>
+                                  </p:stCondLst>
+                                  <p:childTnLst>
+                                    <p:set>
+                                      <p:cBhvr>
+                                        <p:cTn id="16" dur="1" fill="hold">
                                           <p:stCondLst>
                                             <p:cond delay="0"/>
                                           </p:stCondLst>
@@ -12929,7 +12529,7 @@
                                     </p:set>
                                     <p:anim calcmode="lin" valueType="num">
                                       <p:cBhvr additive="base">
-                                        <p:cTn id="13" dur="500" fill="hold"/>
+                                        <p:cTn id="17" dur="500" fill="hold"/>
                                         <p:tgtEl>
                                           <p:spTgt spid="654340">
                                             <p:txEl>
@@ -12956,7 +12556,7 @@
                                     </p:anim>
                                     <p:anim calcmode="lin" valueType="num">
                                       <p:cBhvr additive="base">
-                                        <p:cTn id="14" dur="500" fill="hold"/>
+                                        <p:cTn id="18" dur="500" fill="hold"/>
                                         <p:tgtEl>
                                           <p:spTgt spid="654340">
                                             <p:txEl>
@@ -12991,26 +12591,26 @@
                     </p:cTn>
                   </p:par>
                   <p:par>
-                    <p:cTn id="15" fill="hold">
+                    <p:cTn id="19" fill="hold">
                       <p:stCondLst>
                         <p:cond delay="indefinite"/>
                       </p:stCondLst>
                       <p:childTnLst>
                         <p:par>
-                          <p:cTn id="16" fill="hold">
+                          <p:cTn id="20" fill="hold">
                             <p:stCondLst>
                               <p:cond delay="0"/>
                             </p:stCondLst>
                             <p:childTnLst>
                               <p:par>
-                                <p:cTn id="17" presetID="2" presetClass="entr" presetSubtype="4" fill="hold" nodeType="clickEffect">
+                                <p:cTn id="21" presetID="2" presetClass="entr" presetSubtype="4" fill="hold" grpId="0" nodeType="clickEffect">
                                   <p:stCondLst>
                                     <p:cond delay="0"/>
                                   </p:stCondLst>
                                   <p:childTnLst>
                                     <p:set>
                                       <p:cBhvr>
-                                        <p:cTn id="18" dur="1" fill="hold">
+                                        <p:cTn id="22" dur="1" fill="hold">
                                           <p:stCondLst>
                                             <p:cond delay="0"/>
                                           </p:stCondLst>
@@ -13032,7 +12632,7 @@
                                     </p:set>
                                     <p:anim calcmode="lin" valueType="num">
                                       <p:cBhvr additive="base">
-                                        <p:cTn id="19" dur="500" fill="hold"/>
+                                        <p:cTn id="23" dur="500" fill="hold"/>
                                         <p:tgtEl>
                                           <p:spTgt spid="654340">
                                             <p:txEl>
@@ -13059,7 +12659,7 @@
                                     </p:anim>
                                     <p:anim calcmode="lin" valueType="num">
                                       <p:cBhvr additive="base">
-                                        <p:cTn id="20" dur="500" fill="hold"/>
+                                        <p:cTn id="24" dur="500" fill="hold"/>
                                         <p:tgtEl>
                                           <p:spTgt spid="654340">
                                             <p:txEl>
@@ -13094,26 +12694,26 @@
                     </p:cTn>
                   </p:par>
                   <p:par>
-                    <p:cTn id="21" fill="hold">
+                    <p:cTn id="25" fill="hold">
                       <p:stCondLst>
                         <p:cond delay="indefinite"/>
                       </p:stCondLst>
                       <p:childTnLst>
                         <p:par>
-                          <p:cTn id="22" fill="hold">
+                          <p:cTn id="26" fill="hold">
                             <p:stCondLst>
                               <p:cond delay="0"/>
                             </p:stCondLst>
                             <p:childTnLst>
                               <p:par>
-                                <p:cTn id="23" presetID="2" presetClass="entr" presetSubtype="4" fill="hold" grpId="0" nodeType="clickEffect">
+                                <p:cTn id="27" presetID="2" presetClass="entr" presetSubtype="4" fill="hold" grpId="0" nodeType="clickEffect">
                                   <p:stCondLst>
                                     <p:cond delay="0"/>
                                   </p:stCondLst>
                                   <p:childTnLst>
                                     <p:set>
                                       <p:cBhvr>
-                                        <p:cTn id="24" dur="1" fill="hold">
+                                        <p:cTn id="28" dur="1" fill="hold">
                                           <p:stCondLst>
                                             <p:cond delay="0"/>
                                           </p:stCondLst>
@@ -13131,7 +12731,7 @@
                                     </p:set>
                                     <p:anim calcmode="lin" valueType="num">
                                       <p:cBhvr additive="base">
-                                        <p:cTn id="25" dur="500" fill="hold"/>
+                                        <p:cTn id="29" dur="500" fill="hold"/>
                                         <p:tgtEl>
                                           <p:spTgt spid="3"/>
                                         </p:tgtEl>
@@ -13154,7 +12754,7 @@
                                     </p:anim>
                                     <p:anim calcmode="lin" valueType="num">
                                       <p:cBhvr additive="base">
-                                        <p:cTn id="26" dur="500" fill="hold"/>
+                                        <p:cTn id="30" dur="500" fill="hold"/>
                                         <p:tgtEl>
                                           <p:spTgt spid="3"/>
                                         </p:tgtEl>
@@ -13185,26 +12785,105 @@
                     </p:cTn>
                   </p:par>
                   <p:par>
-                    <p:cTn id="27" fill="hold">
+                    <p:cTn id="31" fill="hold">
                       <p:stCondLst>
                         <p:cond delay="indefinite"/>
                       </p:stCondLst>
                       <p:childTnLst>
                         <p:par>
-                          <p:cTn id="28" fill="hold">
+                          <p:cTn id="32" fill="hold">
                             <p:stCondLst>
                               <p:cond delay="0"/>
                             </p:stCondLst>
                             <p:childTnLst>
                               <p:par>
-                                <p:cTn id="29" presetID="2" presetClass="entr" presetSubtype="4" fill="hold" nodeType="clickEffect">
+                                <p:cTn id="33" presetID="2" presetClass="entr" presetSubtype="4" fill="hold" grpId="0" nodeType="clickEffect">
                                   <p:stCondLst>
                                     <p:cond delay="0"/>
                                   </p:stCondLst>
                                   <p:childTnLst>
                                     <p:set>
                                       <p:cBhvr>
-                                        <p:cTn id="30" dur="1" fill="hold">
+                                        <p:cTn id="34" dur="1" fill="hold">
+                                          <p:stCondLst>
+                                            <p:cond delay="0"/>
+                                          </p:stCondLst>
+                                        </p:cTn>
+                                        <p:tgtEl>
+                                          <p:spTgt spid="6">
+                                            <p:bg/>
+                                          </p:spTgt>
+                                        </p:tgtEl>
+                                        <p:attrNameLst>
+                                          <p:attrName>style.visibility</p:attrName>
+                                        </p:attrNameLst>
+                                      </p:cBhvr>
+                                      <p:to>
+                                        <p:strVal val="visible"/>
+                                      </p:to>
+                                    </p:set>
+                                    <p:anim calcmode="lin" valueType="num">
+                                      <p:cBhvr additive="base">
+                                        <p:cTn id="35" dur="500" fill="hold"/>
+                                        <p:tgtEl>
+                                          <p:spTgt spid="6">
+                                            <p:bg/>
+                                          </p:spTgt>
+                                        </p:tgtEl>
+                                        <p:attrNameLst>
+                                          <p:attrName>ppt_x</p:attrName>
+                                        </p:attrNameLst>
+                                      </p:cBhvr>
+                                      <p:tavLst>
+                                        <p:tav tm="0">
+                                          <p:val>
+                                            <p:strVal val="#ppt_x"/>
+                                          </p:val>
+                                        </p:tav>
+                                        <p:tav tm="100000">
+                                          <p:val>
+                                            <p:strVal val="#ppt_x"/>
+                                          </p:val>
+                                        </p:tav>
+                                      </p:tavLst>
+                                    </p:anim>
+                                    <p:anim calcmode="lin" valueType="num">
+                                      <p:cBhvr additive="base">
+                                        <p:cTn id="36" dur="500" fill="hold"/>
+                                        <p:tgtEl>
+                                          <p:spTgt spid="6">
+                                            <p:bg/>
+                                          </p:spTgt>
+                                        </p:tgtEl>
+                                        <p:attrNameLst>
+                                          <p:attrName>ppt_y</p:attrName>
+                                        </p:attrNameLst>
+                                      </p:cBhvr>
+                                      <p:tavLst>
+                                        <p:tav tm="0">
+                                          <p:val>
+                                            <p:strVal val="1+#ppt_h/2"/>
+                                          </p:val>
+                                        </p:tav>
+                                        <p:tav tm="100000">
+                                          <p:val>
+                                            <p:strVal val="#ppt_y"/>
+                                          </p:val>
+                                        </p:tav>
+                                      </p:tavLst>
+                                    </p:anim>
+                                  </p:childTnLst>
+                                </p:cTn>
+                              </p:par>
+                              <p:par>
+                                <p:cTn id="37" presetID="2" presetClass="entr" presetSubtype="4" fill="hold" grpId="0" nodeType="withEffect">
+                                  <p:stCondLst>
+                                    <p:cond delay="0"/>
+                                  </p:stCondLst>
+                                  <p:childTnLst>
+                                    <p:set>
+                                      <p:cBhvr>
+                                        <p:cTn id="38" dur="1" fill="hold">
                                           <p:stCondLst>
                                             <p:cond delay="0"/>
                                           </p:stCondLst>
@@ -13226,7 +12905,7 @@
                                     </p:set>
                                     <p:anim calcmode="lin" valueType="num">
                                       <p:cBhvr additive="base">
-                                        <p:cTn id="31" dur="500" fill="hold"/>
+                                        <p:cTn id="39" dur="500" fill="hold"/>
                                         <p:tgtEl>
                                           <p:spTgt spid="6">
                                             <p:txEl>
@@ -13253,7 +12932,7 @@
                                     </p:anim>
                                     <p:anim calcmode="lin" valueType="num">
                                       <p:cBhvr additive="base">
-                                        <p:cTn id="32" dur="500" fill="hold"/>
+                                        <p:cTn id="40" dur="500" fill="hold"/>
                                         <p:tgtEl>
                                           <p:spTgt spid="6">
                                             <p:txEl>
@@ -13288,26 +12967,26 @@
                     </p:cTn>
                   </p:par>
                   <p:par>
-                    <p:cTn id="33" fill="hold">
+                    <p:cTn id="41" fill="hold">
                       <p:stCondLst>
                         <p:cond delay="indefinite"/>
                       </p:stCondLst>
                       <p:childTnLst>
                         <p:par>
-                          <p:cTn id="34" fill="hold">
+                          <p:cTn id="42" fill="hold">
                             <p:stCondLst>
                               <p:cond delay="0"/>
                             </p:stCondLst>
                             <p:childTnLst>
                               <p:par>
-                                <p:cTn id="35" presetID="2" presetClass="entr" presetSubtype="4" fill="hold" nodeType="clickEffect">
+                                <p:cTn id="43" presetID="2" presetClass="entr" presetSubtype="4" fill="hold" grpId="0" nodeType="clickEffect">
                                   <p:stCondLst>
                                     <p:cond delay="0"/>
                                   </p:stCondLst>
                                   <p:childTnLst>
                                     <p:set>
                                       <p:cBhvr>
-                                        <p:cTn id="36" dur="1" fill="hold">
+                                        <p:cTn id="44" dur="1" fill="hold">
                                           <p:stCondLst>
                                             <p:cond delay="0"/>
                                           </p:stCondLst>
@@ -13329,7 +13008,7 @@
                                     </p:set>
                                     <p:anim calcmode="lin" valueType="num">
                                       <p:cBhvr additive="base">
-                                        <p:cTn id="37" dur="500" fill="hold"/>
+                                        <p:cTn id="45" dur="500" fill="hold"/>
                                         <p:tgtEl>
                                           <p:spTgt spid="6">
                                             <p:txEl>
@@ -13356,7 +13035,7 @@
                                     </p:anim>
                                     <p:anim calcmode="lin" valueType="num">
                                       <p:cBhvr additive="base">
-                                        <p:cTn id="38" dur="500" fill="hold"/>
+                                        <p:cTn id="46" dur="500" fill="hold"/>
                                         <p:tgtEl>
                                           <p:spTgt spid="6">
                                             <p:txEl>
@@ -13412,6 +13091,8 @@
       </p:par>
     </p:tnLst>
     <p:bldLst>
+      <p:bldP spid="654340" grpId="0" uiExpand="1" build="allAtOnce" animBg="1"/>
+      <p:bldP spid="6" grpId="0" uiExpand="1" build="allAtOnce" animBg="1"/>
       <p:bldP spid="3" grpId="0"/>
     </p:bldLst>
   </p:timing>
@@ -13449,14 +13130,14 @@
           <a:noFill/>
           <a:extLst>
             <a:ext uri="{909E8E84-426E-40dd-AFC4-6F175D3DCCD1}">
-              <a14:hiddenFill xmlns="" xmlns:a14="http://schemas.microsoft.com/office/drawing/2010/main">
+              <a14:hiddenFill xmlns:a14="http://schemas.microsoft.com/office/drawing/2010/main" xmlns="">
                 <a:solidFill>
                   <a:srgbClr val="FFFFFF"/>
                 </a:solidFill>
               </a14:hiddenFill>
             </a:ext>
             <a:ext uri="{91240B29-F687-4f45-9708-019B960494DF}">
-              <a14:hiddenLine xmlns="" xmlns:a14="http://schemas.microsoft.com/office/drawing/2010/main" w="9525">
+              <a14:hiddenLine xmlns:a14="http://schemas.microsoft.com/office/drawing/2010/main" xmlns="" w="9525">
                 <a:solidFill>
                   <a:srgbClr val="000000"/>
                 </a:solidFill>
@@ -13860,14 +13541,14 @@
           <a:noFill/>
           <a:extLst>
             <a:ext uri="{909E8E84-426E-40dd-AFC4-6F175D3DCCD1}">
-              <a14:hiddenFill xmlns="" xmlns:a14="http://schemas.microsoft.com/office/drawing/2010/main">
+              <a14:hiddenFill xmlns:a14="http://schemas.microsoft.com/office/drawing/2010/main" xmlns="">
                 <a:solidFill>
                   <a:srgbClr val="FFFFFF"/>
                 </a:solidFill>
               </a14:hiddenFill>
             </a:ext>
             <a:ext uri="{91240B29-F687-4f45-9708-019B960494DF}">
-              <a14:hiddenLine xmlns="" xmlns:a14="http://schemas.microsoft.com/office/drawing/2010/main" w="9525">
+              <a14:hiddenLine xmlns:a14="http://schemas.microsoft.com/office/drawing/2010/main" xmlns="" w="9525">
                 <a:solidFill>
                   <a:srgbClr val="000000"/>
                 </a:solidFill>
@@ -14873,17 +14554,17 @@
           </a:ln>
           <a:extLst>
             <a:ext uri="{FAA26D3D-D897-4be2-8F04-BA451C77F1D7}">
-              <ma14:placeholderFlag xmlns:ma14="http://schemas.microsoft.com/office/mac/drawingml/2011/main" xmlns="" val="1"/>
+              <ma14:placeholderFlag xmlns="" xmlns:ma14="http://schemas.microsoft.com/office/mac/drawingml/2011/main" val="1"/>
             </a:ext>
             <a:ext uri="{909E8E84-426E-40dd-AFC4-6F175D3DCCD1}">
-              <a14:hiddenFill xmlns:a14="http://schemas.microsoft.com/office/drawing/2010/main" xmlns="">
+              <a14:hiddenFill xmlns="" xmlns:a14="http://schemas.microsoft.com/office/drawing/2010/main">
                 <a:solidFill>
                   <a:srgbClr val="FFFFFF"/>
                 </a:solidFill>
               </a14:hiddenFill>
             </a:ext>
             <a:ext uri="{91240B29-F687-4f45-9708-019B960494DF}">
-              <a14:hiddenLine xmlns:a14="http://schemas.microsoft.com/office/drawing/2010/main" xmlns="" w="9525">
+              <a14:hiddenLine xmlns="" xmlns:a14="http://schemas.microsoft.com/office/drawing/2010/main" w="9525">
                 <a:solidFill>
                   <a:srgbClr val="000000"/>
                 </a:solidFill>
@@ -14947,17 +14628,17 @@
           </a:ln>
           <a:extLst>
             <a:ext uri="{FAA26D3D-D897-4be2-8F04-BA451C77F1D7}">
-              <ma14:placeholderFlag xmlns="" xmlns:ma14="http://schemas.microsoft.com/office/mac/drawingml/2011/main" val="1"/>
+              <ma14:placeholderFlag xmlns:ma14="http://schemas.microsoft.com/office/mac/drawingml/2011/main" xmlns="" val="1"/>
             </a:ext>
             <a:ext uri="{909E8E84-426E-40dd-AFC4-6F175D3DCCD1}">
-              <a14:hiddenFill xmlns="" xmlns:a14="http://schemas.microsoft.com/office/drawing/2010/main">
+              <a14:hiddenFill xmlns:a14="http://schemas.microsoft.com/office/drawing/2010/main" xmlns="">
                 <a:solidFill>
                   <a:srgbClr val="FFFFFF"/>
                 </a:solidFill>
               </a14:hiddenFill>
             </a:ext>
             <a:ext uri="{91240B29-F687-4f45-9708-019B960494DF}">
-              <a14:hiddenLine xmlns="" xmlns:a14="http://schemas.microsoft.com/office/drawing/2010/main" w="9525">
+              <a14:hiddenLine xmlns:a14="http://schemas.microsoft.com/office/drawing/2010/main" xmlns="" w="9525">
                 <a:solidFill>
                   <a:srgbClr val="000000"/>
                 </a:solidFill>
@@ -15127,6 +14808,43 @@
           </a:p>
         </p:txBody>
       </p:sp>
+      <p:sp>
+        <p:nvSpPr>
+          <p:cNvPr id="3" name="TextBox 2">
+            <a:extLst>
+              <a:ext uri="{FF2B5EF4-FFF2-40B4-BE49-F238E27FC236}">
+                <a16:creationId xmlns:a16="http://schemas.microsoft.com/office/drawing/2014/main" id="{B63F350F-91C5-7323-6EB0-53A043E97204}"/>
+              </a:ext>
+            </a:extLst>
+          </p:cNvPr>
+          <p:cNvSpPr txBox="1"/>
+          <p:nvPr/>
+        </p:nvSpPr>
+        <p:spPr>
+          <a:xfrm>
+            <a:off x="8343900" y="2743200"/>
+            <a:ext cx="3086100" cy="369332"/>
+          </a:xfrm>
+          <a:prstGeom prst="rect">
+            <a:avLst/>
+          </a:prstGeom>
+          <a:solidFill>
+            <a:schemeClr val="accent1"/>
+          </a:solidFill>
+        </p:spPr>
+        <p:txBody>
+          <a:bodyPr wrap="square" rtlCol="0">
+            <a:spAutoFit/>
+          </a:bodyPr>
+          <a:lstStyle/>
+          <a:p>
+            <a:r>
+              <a:rPr lang="en-US" dirty="0"/>
+              <a:t>See lab 07 for full example</a:t>
+            </a:r>
+          </a:p>
+        </p:txBody>
+      </p:sp>
     </p:spTree>
     <p:extLst>
       <p:ext uri="{BB962C8B-B14F-4D97-AF65-F5344CB8AC3E}">
@@ -15137,6 +14855,130 @@
   <p:clrMapOvr>
     <a:masterClrMapping/>
   </p:clrMapOvr>
+  <p:timing>
+    <p:tnLst>
+      <p:par>
+        <p:cTn id="1" dur="indefinite" restart="never" nodeType="tmRoot">
+          <p:childTnLst>
+            <p:seq concurrent="1" nextAc="seek">
+              <p:cTn id="2" dur="indefinite" nodeType="mainSeq">
+                <p:childTnLst>
+                  <p:par>
+                    <p:cTn id="3" fill="hold">
+                      <p:stCondLst>
+                        <p:cond delay="indefinite"/>
+                      </p:stCondLst>
+                      <p:childTnLst>
+                        <p:par>
+                          <p:cTn id="4" fill="hold">
+                            <p:stCondLst>
+                              <p:cond delay="0"/>
+                            </p:stCondLst>
+                            <p:childTnLst>
+                              <p:par>
+                                <p:cTn id="5" presetID="2" presetClass="entr" presetSubtype="4" fill="hold" grpId="0" nodeType="clickEffect">
+                                  <p:stCondLst>
+                                    <p:cond delay="0"/>
+                                  </p:stCondLst>
+                                  <p:childTnLst>
+                                    <p:set>
+                                      <p:cBhvr>
+                                        <p:cTn id="6" dur="1" fill="hold">
+                                          <p:stCondLst>
+                                            <p:cond delay="0"/>
+                                          </p:stCondLst>
+                                        </p:cTn>
+                                        <p:tgtEl>
+                                          <p:spTgt spid="3"/>
+                                        </p:tgtEl>
+                                        <p:attrNameLst>
+                                          <p:attrName>style.visibility</p:attrName>
+                                        </p:attrNameLst>
+                                      </p:cBhvr>
+                                      <p:to>
+                                        <p:strVal val="visible"/>
+                                      </p:to>
+                                    </p:set>
+                                    <p:anim calcmode="lin" valueType="num">
+                                      <p:cBhvr additive="base">
+                                        <p:cTn id="7" dur="500" fill="hold"/>
+                                        <p:tgtEl>
+                                          <p:spTgt spid="3"/>
+                                        </p:tgtEl>
+                                        <p:attrNameLst>
+                                          <p:attrName>ppt_x</p:attrName>
+                                        </p:attrNameLst>
+                                      </p:cBhvr>
+                                      <p:tavLst>
+                                        <p:tav tm="0">
+                                          <p:val>
+                                            <p:strVal val="#ppt_x"/>
+                                          </p:val>
+                                        </p:tav>
+                                        <p:tav tm="100000">
+                                          <p:val>
+                                            <p:strVal val="#ppt_x"/>
+                                          </p:val>
+                                        </p:tav>
+                                      </p:tavLst>
+                                    </p:anim>
+                                    <p:anim calcmode="lin" valueType="num">
+                                      <p:cBhvr additive="base">
+                                        <p:cTn id="8" dur="500" fill="hold"/>
+                                        <p:tgtEl>
+                                          <p:spTgt spid="3"/>
+                                        </p:tgtEl>
+                                        <p:attrNameLst>
+                                          <p:attrName>ppt_y</p:attrName>
+                                        </p:attrNameLst>
+                                      </p:cBhvr>
+                                      <p:tavLst>
+                                        <p:tav tm="0">
+                                          <p:val>
+                                            <p:strVal val="1+#ppt_h/2"/>
+                                          </p:val>
+                                        </p:tav>
+                                        <p:tav tm="100000">
+                                          <p:val>
+                                            <p:strVal val="#ppt_y"/>
+                                          </p:val>
+                                        </p:tav>
+                                      </p:tavLst>
+                                    </p:anim>
+                                  </p:childTnLst>
+                                </p:cTn>
+                              </p:par>
+                            </p:childTnLst>
+                          </p:cTn>
+                        </p:par>
+                      </p:childTnLst>
+                    </p:cTn>
+                  </p:par>
+                </p:childTnLst>
+              </p:cTn>
+              <p:prevCondLst>
+                <p:cond evt="onPrev" delay="0">
+                  <p:tgtEl>
+                    <p:sldTgt/>
+                  </p:tgtEl>
+                </p:cond>
+              </p:prevCondLst>
+              <p:nextCondLst>
+                <p:cond evt="onNext" delay="0">
+                  <p:tgtEl>
+                    <p:sldTgt/>
+                  </p:tgtEl>
+                </p:cond>
+              </p:nextCondLst>
+            </p:seq>
+          </p:childTnLst>
+        </p:cTn>
+      </p:par>
+    </p:tnLst>
+    <p:bldLst>
+      <p:bldP spid="3" grpId="0" animBg="1"/>
+    </p:bldLst>
+  </p:timing>
 </p:sld>
 </file>
 
